--- a/Labs/1/Настройка инфраструктуры.pptx
+++ b/Labs/1/Настройка инфраструктуры.pptx
@@ -5,7 +5,7 @@
     <p:sldMasterId id="2147483648" r:id="rId1"/>
   </p:sldMasterIdLst>
   <p:notesMasterIdLst>
-    <p:notesMasterId r:id="rId35"/>
+    <p:notesMasterId r:id="rId34"/>
   </p:notesMasterIdLst>
   <p:sldIdLst>
     <p:sldId id="256" r:id="rId2"/>
@@ -38,9 +38,8 @@
     <p:sldId id="614" r:id="rId29"/>
     <p:sldId id="628" r:id="rId30"/>
     <p:sldId id="629" r:id="rId31"/>
-    <p:sldId id="630" r:id="rId32"/>
-    <p:sldId id="601" r:id="rId33"/>
-    <p:sldId id="599" r:id="rId34"/>
+    <p:sldId id="601" r:id="rId32"/>
+    <p:sldId id="599" r:id="rId33"/>
   </p:sldIdLst>
   <p:sldSz cx="12192000" cy="6858000"/>
   <p:notesSz cx="6858000" cy="9144000"/>
@@ -3235,7 +3234,7 @@
           <a:p>
             <a:fld id="{30C93C39-318F-4D96-A6F0-B4E3B993BBAD}" type="datetimeFigureOut">
               <a:rPr lang="ru-RU" smtClean="0"/>
-              <a:t>25.02.2026</a:t>
+              <a:t>13.03.2026</a:t>
             </a:fld>
             <a:endParaRPr lang="ru-RU"/>
           </a:p>
@@ -3653,7 +3652,7 @@
           <a:p>
             <a:fld id="{AB0939F0-1E74-3248-9C54-35A9B2190B58}" type="datetimeFigureOut">
               <a:rPr lang="ru-RU" smtClean="0"/>
-              <a:t>25.02.2026</a:t>
+              <a:t>13.03.2026</a:t>
             </a:fld>
             <a:endParaRPr lang="ru-RU"/>
           </a:p>
@@ -3826,7 +3825,7 @@
           <a:p>
             <a:fld id="{AB0939F0-1E74-3248-9C54-35A9B2190B58}" type="datetimeFigureOut">
               <a:rPr lang="ru-RU" smtClean="0"/>
-              <a:t>25.02.2026</a:t>
+              <a:t>13.03.2026</a:t>
             </a:fld>
             <a:endParaRPr lang="ru-RU"/>
           </a:p>
@@ -4069,7 +4068,7 @@
           <a:p>
             <a:fld id="{AB0939F0-1E74-3248-9C54-35A9B2190B58}" type="datetimeFigureOut">
               <a:rPr lang="ru-RU" smtClean="0"/>
-              <a:t>25.02.2026</a:t>
+              <a:t>13.03.2026</a:t>
             </a:fld>
             <a:endParaRPr lang="ru-RU"/>
           </a:p>
@@ -4310,7 +4309,7 @@
           <a:p>
             <a:fld id="{AB0939F0-1E74-3248-9C54-35A9B2190B58}" type="datetimeFigureOut">
               <a:rPr lang="ru-RU" smtClean="0"/>
-              <a:t>25.02.2026</a:t>
+              <a:t>13.03.2026</a:t>
             </a:fld>
             <a:endParaRPr lang="ru-RU"/>
           </a:p>
@@ -4648,7 +4647,7 @@
           <a:p>
             <a:fld id="{AB0939F0-1E74-3248-9C54-35A9B2190B58}" type="datetimeFigureOut">
               <a:rPr lang="ru-RU" smtClean="0"/>
-              <a:t>25.02.2026</a:t>
+              <a:t>13.03.2026</a:t>
             </a:fld>
             <a:endParaRPr lang="ru-RU"/>
           </a:p>
@@ -4923,7 +4922,7 @@
           <a:p>
             <a:fld id="{AB0939F0-1E74-3248-9C54-35A9B2190B58}" type="datetimeFigureOut">
               <a:rPr lang="ru-RU" smtClean="0"/>
-              <a:t>25.02.2026</a:t>
+              <a:t>13.03.2026</a:t>
             </a:fld>
             <a:endParaRPr lang="ru-RU"/>
           </a:p>
@@ -5351,7 +5350,7 @@
           <a:p>
             <a:fld id="{AB0939F0-1E74-3248-9C54-35A9B2190B58}" type="datetimeFigureOut">
               <a:rPr lang="ru-RU" smtClean="0"/>
-              <a:t>25.02.2026</a:t>
+              <a:t>13.03.2026</a:t>
             </a:fld>
             <a:endParaRPr lang="ru-RU"/>
           </a:p>
@@ -5552,7 +5551,7 @@
           <a:p>
             <a:fld id="{AB0939F0-1E74-3248-9C54-35A9B2190B58}" type="datetimeFigureOut">
               <a:rPr lang="ru-RU" smtClean="0"/>
-              <a:t>25.02.2026</a:t>
+              <a:t>13.03.2026</a:t>
             </a:fld>
             <a:endParaRPr lang="ru-RU"/>
           </a:p>
@@ -5725,7 +5724,7 @@
           <a:p>
             <a:fld id="{AB0939F0-1E74-3248-9C54-35A9B2190B58}" type="datetimeFigureOut">
               <a:rPr lang="ru-RU" smtClean="0"/>
-              <a:t>25.02.2026</a:t>
+              <a:t>13.03.2026</a:t>
             </a:fld>
             <a:endParaRPr lang="ru-RU"/>
           </a:p>
@@ -6074,7 +6073,7 @@
           <a:p>
             <a:fld id="{AB0939F0-1E74-3248-9C54-35A9B2190B58}" type="datetimeFigureOut">
               <a:rPr lang="ru-RU" smtClean="0"/>
-              <a:t>25.02.2026</a:t>
+              <a:t>13.03.2026</a:t>
             </a:fld>
             <a:endParaRPr lang="ru-RU"/>
           </a:p>
@@ -6425,7 +6424,7 @@
           <a:p>
             <a:fld id="{AB0939F0-1E74-3248-9C54-35A9B2190B58}" type="datetimeFigureOut">
               <a:rPr lang="ru-RU" smtClean="0"/>
-              <a:t>25.02.2026</a:t>
+              <a:t>13.03.2026</a:t>
             </a:fld>
             <a:endParaRPr lang="ru-RU"/>
           </a:p>
@@ -6701,7 +6700,7 @@
           <a:p>
             <a:fld id="{AB0939F0-1E74-3248-9C54-35A9B2190B58}" type="datetimeFigureOut">
               <a:rPr lang="ru-RU" smtClean="0"/>
-              <a:t>25.02.2026</a:t>
+              <a:t>13.03.2026</a:t>
             </a:fld>
             <a:endParaRPr lang="ru-RU"/>
           </a:p>
@@ -11665,7 +11664,7 @@
             </a:r>
             <a:r>
               <a:rPr lang="en-US" dirty="0"/>
-              <a:t>pip install </a:t>
+              <a:t>pip: install </a:t>
             </a:r>
             <a:r>
               <a:rPr lang="en-US" dirty="0" err="1"/>
@@ -13204,7 +13203,7 @@
           <p:nvPr>
             <p:extLst>
               <p:ext uri="{D42A27DB-BD31-4B8C-83A1-F6EECF244321}">
-                <p14:modId xmlns:p14="http://schemas.microsoft.com/office/powerpoint/2010/main" val="3034246296"/>
+                <p14:modId xmlns:p14="http://schemas.microsoft.com/office/powerpoint/2010/main" val="2350795176"/>
               </p:ext>
             </p:extLst>
           </p:nvPr>
@@ -13335,7 +13334,7 @@
                       </a:r>
                       <a:r>
                         <a:rPr lang="en-US" dirty="0" err="1"/>
-                        <a:t>Langchain</a:t>
+                        <a:t>langchain</a:t>
                       </a:r>
                       <a:r>
                         <a:rPr lang="en-US" dirty="0"/>
@@ -14338,7 +14337,12 @@
             <p:ph type="title"/>
           </p:nvPr>
         </p:nvSpPr>
-        <p:spPr/>
+        <p:spPr>
+          <a:xfrm>
+            <a:off x="487329" y="18617"/>
+            <a:ext cx="10515600" cy="1117166"/>
+          </a:xfrm>
+        </p:spPr>
         <p:txBody>
           <a:bodyPr/>
           <a:lstStyle/>
@@ -14357,37 +14361,72 @@
             </a:r>
             <a:r>
               <a:rPr lang="ru-RU" baseline="0" dirty="0"/>
-              <a:t>агента (настройка окружения)</a:t>
+              <a:t>агента (настройка)</a:t>
             </a:r>
             <a:endParaRPr lang="ru-RU" dirty="0"/>
           </a:p>
         </p:txBody>
       </p:sp>
-      <p:sp>
-        <p:nvSpPr>
-          <p:cNvPr id="3" name="Объект 2">
+      <p:pic>
+        <p:nvPicPr>
+          <p:cNvPr id="4" name="Рисунок 3">
             <a:extLst>
               <a:ext uri="{FF2B5EF4-FFF2-40B4-BE49-F238E27FC236}">
-                <a16:creationId xmlns:a16="http://schemas.microsoft.com/office/drawing/2014/main" id="{1AF5B260-2833-4C02-9E2C-CB45A3040328}"/>
+                <a16:creationId xmlns:a16="http://schemas.microsoft.com/office/drawing/2014/main" id="{DCFAB72D-84B7-45A5-9B70-5C8314786AD2}"/>
               </a:ext>
             </a:extLst>
           </p:cNvPr>
-          <p:cNvSpPr>
-            <a:spLocks noGrp="1"/>
-          </p:cNvSpPr>
-          <p:nvPr>
-            <p:ph idx="1"/>
-          </p:nvPr>
-        </p:nvSpPr>
-        <p:spPr/>
-        <p:txBody>
-          <a:bodyPr/>
-          <a:lstStyle/>
-          <a:p>
-            <a:endParaRPr lang="ru-RU"/>
-          </a:p>
-        </p:txBody>
-      </p:sp>
+          <p:cNvPicPr>
+            <a:picLocks noChangeAspect="1"/>
+          </p:cNvPicPr>
+          <p:nvPr/>
+        </p:nvPicPr>
+        <p:blipFill>
+          <a:blip r:embed="rId2"/>
+          <a:stretch>
+            <a:fillRect/>
+          </a:stretch>
+        </p:blipFill>
+        <p:spPr>
+          <a:xfrm>
+            <a:off x="487329" y="1080438"/>
+            <a:ext cx="6943725" cy="5534025"/>
+          </a:xfrm>
+          <a:prstGeom prst="rect">
+            <a:avLst/>
+          </a:prstGeom>
+        </p:spPr>
+      </p:pic>
+      <p:pic>
+        <p:nvPicPr>
+          <p:cNvPr id="5" name="Рисунок 4">
+            <a:extLst>
+              <a:ext uri="{FF2B5EF4-FFF2-40B4-BE49-F238E27FC236}">
+                <a16:creationId xmlns:a16="http://schemas.microsoft.com/office/drawing/2014/main" id="{EDE515A0-564F-40CA-82B5-27ADAA44645D}"/>
+              </a:ext>
+            </a:extLst>
+          </p:cNvPr>
+          <p:cNvPicPr>
+            <a:picLocks noChangeAspect="1"/>
+          </p:cNvPicPr>
+          <p:nvPr/>
+        </p:nvPicPr>
+        <p:blipFill>
+          <a:blip r:embed="rId3"/>
+          <a:stretch>
+            <a:fillRect/>
+          </a:stretch>
+        </p:blipFill>
+        <p:spPr>
+          <a:xfrm>
+            <a:off x="6469280" y="1791452"/>
+            <a:ext cx="5086350" cy="4333875"/>
+          </a:xfrm>
+          <a:prstGeom prst="rect">
+            <a:avLst/>
+          </a:prstGeom>
+        </p:spPr>
+      </p:pic>
     </p:spTree>
     <p:extLst>
       <p:ext uri="{BB962C8B-B14F-4D97-AF65-F5344CB8AC3E}">
@@ -14454,31 +14493,36 @@
           </a:p>
         </p:txBody>
       </p:sp>
-      <p:sp>
-        <p:nvSpPr>
-          <p:cNvPr id="3" name="Объект 2">
+      <p:pic>
+        <p:nvPicPr>
+          <p:cNvPr id="4" name="Рисунок 3">
             <a:extLst>
               <a:ext uri="{FF2B5EF4-FFF2-40B4-BE49-F238E27FC236}">
-                <a16:creationId xmlns:a16="http://schemas.microsoft.com/office/drawing/2014/main" id="{1C4AA988-9EA1-4ED0-A6FA-3E8A509872C3}"/>
+                <a16:creationId xmlns:a16="http://schemas.microsoft.com/office/drawing/2014/main" id="{081886FA-7638-45DF-AA78-7D8AF8C40060}"/>
               </a:ext>
             </a:extLst>
           </p:cNvPr>
-          <p:cNvSpPr>
-            <a:spLocks noGrp="1"/>
-          </p:cNvSpPr>
-          <p:nvPr>
-            <p:ph idx="1"/>
-          </p:nvPr>
-        </p:nvSpPr>
-        <p:spPr/>
-        <p:txBody>
-          <a:bodyPr/>
-          <a:lstStyle/>
-          <a:p>
-            <a:endParaRPr lang="ru-RU"/>
-          </a:p>
-        </p:txBody>
-      </p:sp>
+          <p:cNvPicPr>
+            <a:picLocks noChangeAspect="1"/>
+          </p:cNvPicPr>
+          <p:nvPr/>
+        </p:nvPicPr>
+        <p:blipFill>
+          <a:blip r:embed="rId2"/>
+          <a:stretch>
+            <a:fillRect/>
+          </a:stretch>
+        </p:blipFill>
+        <p:spPr>
+          <a:xfrm>
+            <a:off x="1067903" y="1690688"/>
+            <a:ext cx="4781550" cy="4419600"/>
+          </a:xfrm>
+          <a:prstGeom prst="rect">
+            <a:avLst/>
+          </a:prstGeom>
+        </p:spPr>
+      </p:pic>
     </p:spTree>
     <p:extLst>
       <p:ext uri="{BB962C8B-B14F-4D97-AF65-F5344CB8AC3E}">
@@ -16097,13 +16141,13 @@
         </p:nvSpPr>
         <p:spPr>
           <a:xfrm>
-            <a:off x="838200" y="1690687"/>
-            <a:ext cx="10515600" cy="4802187"/>
+            <a:off x="838199" y="1567647"/>
+            <a:ext cx="10981623" cy="4941119"/>
           </a:xfrm>
         </p:spPr>
         <p:txBody>
           <a:bodyPr>
-            <a:normAutofit fontScale="62500" lnSpcReduction="20000"/>
+            <a:normAutofit/>
           </a:bodyPr>
           <a:lstStyle/>
           <a:p>
@@ -16111,7 +16155,7 @@
               <a:buNone/>
             </a:pPr>
             <a:r>
-              <a:rPr lang="ru-RU" dirty="0"/>
+              <a:rPr lang="ru-RU" sz="1600" dirty="0"/>
               <a:t>Указаны рекомендованные версии ПО, проверенные на работоспособность в феврале 2026.</a:t>
             </a:r>
           </a:p>
@@ -16120,285 +16164,333 @@
               <a:buNone/>
             </a:pPr>
             <a:r>
-              <a:rPr lang="ru-RU" b="1" dirty="0"/>
+              <a:rPr lang="ru-RU" sz="1600" b="1" dirty="0"/>
               <a:t>Знания</a:t>
             </a:r>
           </a:p>
           <a:p>
             <a:r>
-              <a:rPr lang="ru-RU" dirty="0"/>
+              <a:rPr lang="ru-RU" sz="1600" dirty="0"/>
               <a:t>Администрирование и системные команды </a:t>
             </a:r>
             <a:r>
-              <a:rPr lang="en-US" dirty="0" err="1"/>
+              <a:rPr lang="en-US" sz="1600" dirty="0" err="1"/>
               <a:t>linux</a:t>
             </a:r>
             <a:r>
-              <a:rPr lang="ru-RU" dirty="0"/>
+              <a:rPr lang="ru-RU" sz="1600" dirty="0"/>
               <a:t>, умение устанавливать и настраивать пакеты ПО (</a:t>
             </a:r>
             <a:r>
-              <a:rPr lang="en-US" dirty="0"/>
+              <a:rPr lang="en-US" sz="1600" dirty="0"/>
               <a:t>ubuntu 24.0</a:t>
             </a:r>
             <a:r>
-              <a:rPr lang="ru-RU" dirty="0"/>
+              <a:rPr lang="ru-RU" sz="1600" dirty="0"/>
               <a:t>4</a:t>
             </a:r>
             <a:r>
-              <a:rPr lang="en-US" dirty="0"/>
+              <a:rPr lang="en-US" sz="1600" dirty="0"/>
               <a:t>, kali 6.16.8</a:t>
             </a:r>
             <a:r>
-              <a:rPr lang="ru-RU" dirty="0"/>
+              <a:rPr lang="ru-RU" sz="1600" dirty="0"/>
               <a:t>)</a:t>
             </a:r>
-            <a:endParaRPr lang="en-US" dirty="0"/>
-          </a:p>
-          <a:p>
-            <a:r>
-              <a:rPr lang="ru-RU" dirty="0"/>
+            <a:endParaRPr lang="en-US" sz="1600" dirty="0"/>
+          </a:p>
+          <a:p>
+            <a:r>
+              <a:rPr lang="ru-RU" sz="1600" dirty="0"/>
               <a:t>Программирование </a:t>
             </a:r>
             <a:r>
-              <a:rPr lang="en-US" dirty="0"/>
+              <a:rPr lang="en-US" sz="1600" dirty="0"/>
               <a:t>python </a:t>
             </a:r>
             <a:r>
-              <a:rPr lang="ru-RU" dirty="0"/>
+              <a:rPr lang="ru-RU" sz="1600" dirty="0"/>
               <a:t>на базовом уровне (3.1</a:t>
             </a:r>
             <a:r>
-              <a:rPr lang="en-US" dirty="0"/>
+              <a:rPr lang="en-US" sz="1600" dirty="0"/>
               <a:t>0</a:t>
             </a:r>
             <a:r>
-              <a:rPr lang="ru-RU" dirty="0"/>
+              <a:rPr lang="ru-RU" sz="1600" dirty="0"/>
               <a:t>+</a:t>
             </a:r>
             <a:r>
-              <a:rPr lang="en-US" dirty="0"/>
+              <a:rPr lang="en-US" sz="1600" dirty="0"/>
               <a:t>, </a:t>
             </a:r>
             <a:r>
-              <a:rPr lang="ru-RU" dirty="0"/>
+              <a:rPr lang="ru-RU" sz="1600" dirty="0"/>
               <a:t>в </a:t>
             </a:r>
             <a:r>
-              <a:rPr lang="en-US" dirty="0"/>
+              <a:rPr lang="en-US" sz="1600" dirty="0"/>
               <a:t>Ubuntu 24.04 </a:t>
             </a:r>
             <a:r>
-              <a:rPr lang="ru-RU" dirty="0"/>
+              <a:rPr lang="ru-RU" sz="1600" dirty="0"/>
               <a:t>предустановлен </a:t>
             </a:r>
             <a:r>
-              <a:rPr lang="en-US" dirty="0"/>
+              <a:rPr lang="en-US" sz="1600" dirty="0"/>
               <a:t>python3.12</a:t>
             </a:r>
             <a:r>
-              <a:rPr lang="ru-RU" dirty="0"/>
+              <a:rPr lang="ru-RU" sz="1600" dirty="0"/>
               <a:t>)</a:t>
             </a:r>
           </a:p>
           <a:p>
             <a:r>
-              <a:rPr lang="ru-RU" dirty="0"/>
-              <a:t>Работа с гипервизором</a:t>
-            </a:r>
-            <a:r>
-              <a:rPr lang="en-US" dirty="0"/>
+              <a:rPr lang="en-US" sz="1600" dirty="0"/>
+              <a:t>wsl2 (MS2010 </a:t>
+            </a:r>
+            <a:r>
+              <a:rPr lang="ru-RU" sz="1600" dirty="0"/>
+              <a:t>версия 2004+</a:t>
+            </a:r>
+            <a:r>
+              <a:rPr lang="en-US" sz="1600" dirty="0"/>
+              <a:t>)</a:t>
+            </a:r>
+            <a:r>
+              <a:rPr lang="ru-RU" sz="1600" dirty="0"/>
+              <a:t>, гипервизор</a:t>
+            </a:r>
+            <a:r>
+              <a:rPr lang="en-US" sz="1600" dirty="0"/>
               <a:t> (</a:t>
             </a:r>
             <a:r>
-              <a:rPr lang="en-US" dirty="0" err="1"/>
-              <a:t>virtualbox</a:t>
-            </a:r>
-            <a:r>
-              <a:rPr lang="en-US" dirty="0"/>
-              <a:t> 7.0+), </a:t>
-            </a:r>
-            <a:r>
-              <a:rPr lang="ru-RU" dirty="0"/>
+              <a:rPr lang="en-US" sz="1600" dirty="0" err="1"/>
+              <a:t>vmware</a:t>
+            </a:r>
+            <a:r>
+              <a:rPr lang="en-US" sz="1600" dirty="0"/>
+              <a:t>), </a:t>
+            </a:r>
+            <a:r>
+              <a:rPr lang="ru-RU" sz="1600" dirty="0"/>
               <a:t>либо применение облачного сервиса (</a:t>
             </a:r>
             <a:r>
-              <a:rPr lang="en-US" dirty="0"/>
+              <a:rPr lang="en-US" sz="1600" dirty="0"/>
               <a:t>Yandex Cloud “Compute Cloud”</a:t>
             </a:r>
             <a:r>
-              <a:rPr lang="ru-RU" dirty="0"/>
+              <a:rPr lang="ru-RU" sz="1600" dirty="0"/>
               <a:t>)</a:t>
             </a:r>
-            <a:endParaRPr lang="en-US" dirty="0"/>
-          </a:p>
-          <a:p>
-            <a:r>
-              <a:rPr lang="ru-RU" dirty="0"/>
+            <a:endParaRPr lang="en-US" sz="1600" dirty="0"/>
+          </a:p>
+          <a:p>
+            <a:r>
+              <a:rPr lang="ru-RU" sz="1600" dirty="0"/>
               <a:t>Умение создавать, настраивать и использовать виртуальные машины</a:t>
             </a:r>
           </a:p>
           <a:p>
             <a:r>
-              <a:rPr lang="ru-RU" dirty="0"/>
+              <a:rPr lang="ru-RU" sz="1600" dirty="0"/>
               <a:t>Сетевые и </a:t>
             </a:r>
             <a:r>
-              <a:rPr lang="en-US" dirty="0"/>
+              <a:rPr lang="en-US" sz="1600" dirty="0"/>
               <a:t>web </a:t>
             </a:r>
             <a:r>
-              <a:rPr lang="ru-RU" dirty="0"/>
+              <a:rPr lang="ru-RU" sz="1600" dirty="0"/>
               <a:t>технологии (</a:t>
             </a:r>
             <a:r>
-              <a:rPr lang="en-US" dirty="0" err="1"/>
+              <a:rPr lang="en-US" sz="1600" dirty="0" err="1"/>
               <a:t>tcp</a:t>
             </a:r>
             <a:r>
-              <a:rPr lang="en-US" dirty="0"/>
+              <a:rPr lang="en-US" sz="1600" dirty="0"/>
               <a:t>/</a:t>
             </a:r>
             <a:r>
-              <a:rPr lang="en-US" dirty="0" err="1"/>
+              <a:rPr lang="en-US" sz="1600" dirty="0" err="1"/>
               <a:t>ip</a:t>
             </a:r>
             <a:r>
-              <a:rPr lang="ru-RU" dirty="0"/>
+              <a:rPr lang="ru-RU" sz="1600" dirty="0"/>
               <a:t>, сокеты, </a:t>
             </a:r>
             <a:r>
-              <a:rPr lang="en-US" dirty="0"/>
+              <a:rPr lang="en-US" sz="1600" dirty="0"/>
               <a:t>ftp, </a:t>
             </a:r>
             <a:r>
-              <a:rPr lang="en-US" dirty="0" err="1"/>
+              <a:rPr lang="en-US" sz="1600" dirty="0" err="1"/>
               <a:t>ssh</a:t>
             </a:r>
             <a:r>
-              <a:rPr lang="en-US" dirty="0"/>
+              <a:rPr lang="en-US" sz="1600" dirty="0"/>
               <a:t>/</a:t>
             </a:r>
             <a:r>
-              <a:rPr lang="en-US" dirty="0" err="1"/>
+              <a:rPr lang="en-US" sz="1600" dirty="0" err="1"/>
               <a:t>scp</a:t>
             </a:r>
             <a:r>
-              <a:rPr lang="en-US" dirty="0"/>
+              <a:rPr lang="en-US" sz="1600" dirty="0"/>
               <a:t>, ping/</a:t>
             </a:r>
             <a:r>
-              <a:rPr lang="en-US" dirty="0" err="1"/>
+              <a:rPr lang="en-US" sz="1600" dirty="0" err="1"/>
               <a:t>wget</a:t>
             </a:r>
             <a:r>
-              <a:rPr lang="en-US" dirty="0"/>
+              <a:rPr lang="en-US" sz="1600" dirty="0"/>
               <a:t>/curl, API</a:t>
             </a:r>
             <a:r>
-              <a:rPr lang="ru-RU" dirty="0"/>
+              <a:rPr lang="ru-RU" sz="1600" dirty="0"/>
               <a:t>)</a:t>
             </a:r>
           </a:p>
           <a:p>
             <a:r>
-              <a:rPr lang="ru-RU" dirty="0"/>
+              <a:rPr lang="ru-RU" sz="1600" dirty="0"/>
               <a:t>Понимание принципов работы аппаратного обеспечения для </a:t>
             </a:r>
             <a:r>
-              <a:rPr lang="en-US" dirty="0"/>
+              <a:rPr lang="en-US" sz="1600" dirty="0"/>
               <a:t>LLM (HDD, RAM, CPU/GPU)</a:t>
             </a:r>
-            <a:endParaRPr lang="ru-RU" dirty="0"/>
+            <a:endParaRPr lang="ru-RU" sz="1600" dirty="0"/>
           </a:p>
           <a:p>
             <a:pPr marL="0" indent="0">
               <a:buNone/>
             </a:pPr>
             <a:r>
-              <a:rPr lang="ru-RU" b="1" dirty="0"/>
+              <a:rPr lang="ru-RU" sz="1600" b="1" dirty="0"/>
               <a:t>Инструменты</a:t>
             </a:r>
           </a:p>
           <a:p>
             <a:r>
-              <a:rPr lang="ru-RU" dirty="0"/>
+              <a:rPr lang="ru-RU" sz="1600" dirty="0"/>
               <a:t>Инфраструктура с </a:t>
             </a:r>
             <a:r>
-              <a:rPr lang="en-US" dirty="0"/>
+              <a:rPr lang="en-US" sz="1600" dirty="0"/>
               <a:t>GPU (</a:t>
             </a:r>
             <a:r>
-              <a:rPr lang="ru-RU" dirty="0"/>
+              <a:rPr lang="ru-RU" sz="1600" dirty="0"/>
               <a:t>предпочтительно </a:t>
             </a:r>
             <a:r>
-              <a:rPr lang="en-US" dirty="0"/>
+              <a:rPr lang="en-US" sz="1600" dirty="0"/>
               <a:t>Yandex Cloud </a:t>
             </a:r>
             <a:r>
-              <a:rPr lang="ru-RU" dirty="0"/>
+              <a:rPr lang="ru-RU" sz="1600" dirty="0"/>
               <a:t>или </a:t>
             </a:r>
             <a:r>
-              <a:rPr lang="en-US" dirty="0" err="1"/>
+              <a:rPr lang="en-US" sz="1600" dirty="0" err="1"/>
               <a:t>Sber</a:t>
             </a:r>
             <a:r>
-              <a:rPr lang="en-US" dirty="0"/>
+              <a:rPr lang="en-US" sz="1600" dirty="0"/>
               <a:t> Cloud</a:t>
             </a:r>
             <a:r>
-              <a:rPr lang="ru-RU" dirty="0"/>
+              <a:rPr lang="ru-RU" sz="1600" dirty="0"/>
               <a:t> – требуется наличие аккаунтов</a:t>
             </a:r>
             <a:r>
-              <a:rPr lang="en-US" dirty="0"/>
+              <a:rPr lang="en-US" sz="1600" dirty="0"/>
               <a:t>). </a:t>
             </a:r>
             <a:r>
-              <a:rPr lang="ru-RU" dirty="0"/>
-              <a:t>Возможно применение локальной </a:t>
-            </a:r>
-            <a:r>
-              <a:rPr lang="en-US" dirty="0"/>
+              <a:rPr lang="ru-RU" sz="1600" dirty="0"/>
+              <a:t>Также возможно </a:t>
+            </a:r>
+            <a:endParaRPr lang="en-US" sz="1600" dirty="0"/>
+          </a:p>
+          <a:p>
+            <a:pPr lvl="1"/>
+            <a:r>
+              <a:rPr lang="ru-RU" sz="1400" dirty="0"/>
+              <a:t>применение локальной </a:t>
+            </a:r>
+            <a:r>
+              <a:rPr lang="en-US" sz="1400" dirty="0"/>
               <a:t>GPU </a:t>
             </a:r>
             <a:r>
-              <a:rPr lang="ru-RU" dirty="0"/>
+              <a:rPr lang="ru-RU" sz="1400" dirty="0"/>
               <a:t>на собственном сервере (без виртуализации)</a:t>
             </a:r>
           </a:p>
           <a:p>
-            <a:r>
-              <a:rPr lang="ru-RU" dirty="0"/>
+            <a:pPr lvl="1"/>
+            <a:r>
+              <a:rPr lang="ru-RU" sz="1400" dirty="0"/>
+              <a:t>Использование облачных ресурсов </a:t>
+            </a:r>
+            <a:r>
+              <a:rPr lang="en-US" sz="1400" dirty="0"/>
+              <a:t>google </a:t>
+            </a:r>
+            <a:r>
+              <a:rPr lang="en-US" sz="1400" dirty="0" err="1"/>
+              <a:t>colab</a:t>
+            </a:r>
+            <a:r>
+              <a:rPr lang="en-US" sz="1400" dirty="0"/>
+              <a:t> </a:t>
+            </a:r>
+            <a:r>
+              <a:rPr lang="ru-RU" sz="1400" dirty="0"/>
+              <a:t>или </a:t>
+            </a:r>
+            <a:r>
+              <a:rPr lang="en-US" sz="1400" dirty="0" err="1"/>
+              <a:t>kaggle</a:t>
+            </a:r>
+            <a:endParaRPr lang="ru-RU" sz="1400" dirty="0"/>
+          </a:p>
+          <a:p>
+            <a:r>
+              <a:rPr lang="ru-RU" sz="1600" dirty="0"/>
               <a:t>Образы виртуальных машин: </a:t>
             </a:r>
             <a:r>
-              <a:rPr lang="en-US" dirty="0"/>
+              <a:rPr lang="en-US" sz="1600" dirty="0"/>
               <a:t>LLM host (Ubuntu 24.04) </a:t>
             </a:r>
             <a:r>
-              <a:rPr lang="ru-RU" dirty="0"/>
+              <a:rPr lang="ru-RU" sz="1600" dirty="0"/>
               <a:t>и </a:t>
             </a:r>
             <a:r>
-              <a:rPr lang="en-US" dirty="0"/>
+              <a:rPr lang="en-US" sz="1600" dirty="0"/>
               <a:t>Red Team host (kali 6.16.8)</a:t>
             </a:r>
-            <a:endParaRPr lang="ru-RU" dirty="0"/>
-          </a:p>
-          <a:p>
-            <a:r>
-              <a:rPr lang="ru-RU" dirty="0"/>
+            <a:endParaRPr lang="ru-RU" sz="1600" dirty="0"/>
+          </a:p>
+          <a:p>
+            <a:r>
+              <a:rPr lang="ru-RU" sz="1600" dirty="0"/>
               <a:t>Доступ в интернет для скачивания ПО и моделей</a:t>
             </a:r>
             <a:r>
-              <a:rPr lang="en-US" dirty="0"/>
+              <a:rPr lang="en-US" sz="1600" dirty="0"/>
               <a:t> LLM</a:t>
             </a:r>
-            <a:endParaRPr lang="ru-RU" dirty="0"/>
+            <a:endParaRPr lang="ru-RU" sz="1600" dirty="0"/>
           </a:p>
         </p:txBody>
       </p:sp>
@@ -16586,90 +16678,6 @@
           <p:cNvPr id="2" name="Заголовок 1">
             <a:extLst>
               <a:ext uri="{FF2B5EF4-FFF2-40B4-BE49-F238E27FC236}">
-                <a16:creationId xmlns:a16="http://schemas.microsoft.com/office/drawing/2014/main" id="{5F598D3A-8F21-46D6-BBD4-C06C6EC832E0}"/>
-              </a:ext>
-            </a:extLst>
-          </p:cNvPr>
-          <p:cNvSpPr>
-            <a:spLocks noGrp="1"/>
-          </p:cNvSpPr>
-          <p:nvPr>
-            <p:ph type="title"/>
-          </p:nvPr>
-        </p:nvSpPr>
-        <p:spPr/>
-        <p:txBody>
-          <a:bodyPr/>
-          <a:lstStyle/>
-          <a:p>
-            <a:r>
-              <a:rPr lang="en-US" dirty="0"/>
-              <a:t>red teaming LLM (Burp Suit)</a:t>
-            </a:r>
-            <a:endParaRPr lang="ru-RU" dirty="0"/>
-          </a:p>
-        </p:txBody>
-      </p:sp>
-      <p:sp>
-        <p:nvSpPr>
-          <p:cNvPr id="3" name="Объект 2">
-            <a:extLst>
-              <a:ext uri="{FF2B5EF4-FFF2-40B4-BE49-F238E27FC236}">
-                <a16:creationId xmlns:a16="http://schemas.microsoft.com/office/drawing/2014/main" id="{EA12E945-89C1-4102-BCEF-1768B6346E7E}"/>
-              </a:ext>
-            </a:extLst>
-          </p:cNvPr>
-          <p:cNvSpPr>
-            <a:spLocks noGrp="1"/>
-          </p:cNvSpPr>
-          <p:nvPr>
-            <p:ph idx="1"/>
-          </p:nvPr>
-        </p:nvSpPr>
-        <p:spPr/>
-        <p:txBody>
-          <a:bodyPr/>
-          <a:lstStyle/>
-          <a:p>
-            <a:endParaRPr lang="ru-RU"/>
-          </a:p>
-        </p:txBody>
-      </p:sp>
-    </p:spTree>
-    <p:extLst>
-      <p:ext uri="{BB962C8B-B14F-4D97-AF65-F5344CB8AC3E}">
-        <p14:creationId xmlns:p14="http://schemas.microsoft.com/office/powerpoint/2010/main" val="590542514"/>
-      </p:ext>
-    </p:extLst>
-  </p:cSld>
-  <p:clrMapOvr>
-    <a:masterClrMapping/>
-  </p:clrMapOvr>
-</p:sld>
-</file>
-
-<file path=ppt/slides/slide32.xml><?xml version="1.0" encoding="utf-8"?>
-<p:sld xmlns:a="http://schemas.openxmlformats.org/drawingml/2006/main" xmlns:r="http://schemas.openxmlformats.org/officeDocument/2006/relationships" xmlns:p="http://schemas.openxmlformats.org/presentationml/2006/main">
-  <p:cSld>
-    <p:spTree>
-      <p:nvGrpSpPr>
-        <p:cNvPr id="1" name=""/>
-        <p:cNvGrpSpPr/>
-        <p:nvPr/>
-      </p:nvGrpSpPr>
-      <p:grpSpPr>
-        <a:xfrm>
-          <a:off x="0" y="0"/>
-          <a:ext cx="0" cy="0"/>
-          <a:chOff x="0" y="0"/>
-          <a:chExt cx="0" cy="0"/>
-        </a:xfrm>
-      </p:grpSpPr>
-      <p:sp>
-        <p:nvSpPr>
-          <p:cNvPr id="2" name="Заголовок 1">
-            <a:extLst>
-              <a:ext uri="{FF2B5EF4-FFF2-40B4-BE49-F238E27FC236}">
                 <a16:creationId xmlns:a16="http://schemas.microsoft.com/office/drawing/2014/main" id="{C5AFAC8C-675D-4ED1-BAE7-1BAEAC2233B5}"/>
               </a:ext>
             </a:extLst>
@@ -16752,7 +16760,7 @@
 </p:sld>
 </file>
 
-<file path=ppt/slides/slide33.xml><?xml version="1.0" encoding="utf-8"?>
+<file path=ppt/slides/slide32.xml><?xml version="1.0" encoding="utf-8"?>
 <p:sld xmlns:a="http://schemas.openxmlformats.org/drawingml/2006/main" xmlns:r="http://schemas.openxmlformats.org/officeDocument/2006/relationships" xmlns:p="http://schemas.openxmlformats.org/presentationml/2006/main">
   <p:cSld>
     <p:spTree>
@@ -16899,7 +16907,15 @@
           <a:p>
             <a:r>
               <a:rPr lang="ru-RU" dirty="0"/>
-              <a:t>Установить и настроить гипервизор </a:t>
+              <a:t>Установить </a:t>
+            </a:r>
+            <a:r>
+              <a:rPr lang="en-US" dirty="0"/>
+              <a:t>wsl2,</a:t>
+            </a:r>
+            <a:r>
+              <a:rPr lang="ru-RU" dirty="0"/>
+              <a:t> гипервизор </a:t>
             </a:r>
             <a:r>
               <a:rPr lang="en-US" dirty="0"/>
@@ -16907,11 +16923,19 @@
             </a:r>
             <a:r>
               <a:rPr lang="en-US" dirty="0" err="1"/>
-              <a:t>virtualbox</a:t>
+              <a:t>vmware</a:t>
             </a:r>
             <a:r>
               <a:rPr lang="en-US" dirty="0"/>
-              <a:t> 7.0), </a:t>
+              <a:t>/</a:t>
+            </a:r>
+            <a:r>
+              <a:rPr lang="en-US" dirty="0" err="1"/>
+              <a:t>vbox</a:t>
+            </a:r>
+            <a:r>
+              <a:rPr lang="en-US" dirty="0"/>
+              <a:t>), </a:t>
             </a:r>
             <a:r>
               <a:rPr lang="ru-RU" dirty="0"/>
@@ -18211,7 +18235,7 @@
                 <a:ea typeface="Calibri" panose="020F0502020204030204" pitchFamily="34" charset="0"/>
                 <a:cs typeface="Times New Roman" panose="02020603050405020304" pitchFamily="18" charset="0"/>
               </a:rPr>
-              <a:t>Qwen3-8B: 8 млрд параметров, контекст до 128K токенов, обучена на ~36 трлн токенов (qwenlm.github.io). Хорошо справляется с общими задачами, кодом и рассуждениями.</a:t>
+              <a:t>Qwen3-8B: 8 млрд параметров, контекст до 128K токенов. Хорошо справляется с общими задачами, кодом и рассуждениями.</a:t>
             </a:r>
             <a:endParaRPr kumimoji="0" lang="ru-RU" altLang="ru-RU" sz="1050" b="0" i="0" u="none" strike="noStrike" cap="none" normalizeH="0" baseline="0" dirty="0">
               <a:ln>
@@ -20055,110 +20079,6 @@
               </a:rPr>
               <a:t>https://ubuntu.com/download/desktop</a:t>
             </a:r>
-            <a:endParaRPr lang="ru-RU" dirty="0"/>
-          </a:p>
-        </p:txBody>
-      </p:sp>
-      <p:sp>
-        <p:nvSpPr>
-          <p:cNvPr id="6" name="Овал 5">
-            <a:extLst>
-              <a:ext uri="{FF2B5EF4-FFF2-40B4-BE49-F238E27FC236}">
-                <a16:creationId xmlns:a16="http://schemas.microsoft.com/office/drawing/2014/main" id="{FCE849A3-BCF6-442B-8EA9-CA5E579F3779}"/>
-              </a:ext>
-            </a:extLst>
-          </p:cNvPr>
-          <p:cNvSpPr/>
-          <p:nvPr/>
-        </p:nvSpPr>
-        <p:spPr>
-          <a:xfrm>
-            <a:off x="8678915" y="578238"/>
-            <a:ext cx="704161" cy="716096"/>
-          </a:xfrm>
-          <a:prstGeom prst="ellipse">
-            <a:avLst/>
-          </a:prstGeom>
-          <a:noFill/>
-          <a:ln w="28575">
-            <a:solidFill>
-              <a:srgbClr val="E50046"/>
-            </a:solidFill>
-          </a:ln>
-        </p:spPr>
-        <p:style>
-          <a:lnRef idx="2">
-            <a:schemeClr val="accent1">
-              <a:shade val="50000"/>
-            </a:schemeClr>
-          </a:lnRef>
-          <a:fillRef idx="1">
-            <a:schemeClr val="accent1"/>
-          </a:fillRef>
-          <a:effectRef idx="0">
-            <a:schemeClr val="accent1"/>
-          </a:effectRef>
-          <a:fontRef idx="minor">
-            <a:schemeClr val="lt1"/>
-          </a:fontRef>
-        </p:style>
-        <p:txBody>
-          <a:bodyPr rtlCol="0" anchor="ctr"/>
-          <a:lstStyle/>
-          <a:p>
-            <a:pPr algn="ctr"/>
-            <a:endParaRPr lang="ru-RU" dirty="0"/>
-          </a:p>
-        </p:txBody>
-      </p:sp>
-      <p:sp>
-        <p:nvSpPr>
-          <p:cNvPr id="8" name="Овал 7">
-            <a:extLst>
-              <a:ext uri="{FF2B5EF4-FFF2-40B4-BE49-F238E27FC236}">
-                <a16:creationId xmlns:a16="http://schemas.microsoft.com/office/drawing/2014/main" id="{4AAAE806-3D26-46E1-9A03-4FED9AFA47DF}"/>
-              </a:ext>
-            </a:extLst>
-          </p:cNvPr>
-          <p:cNvSpPr/>
-          <p:nvPr/>
-        </p:nvSpPr>
-        <p:spPr>
-          <a:xfrm>
-            <a:off x="6794654" y="669858"/>
-            <a:ext cx="704161" cy="716096"/>
-          </a:xfrm>
-          <a:prstGeom prst="ellipse">
-            <a:avLst/>
-          </a:prstGeom>
-          <a:noFill/>
-          <a:ln w="28575">
-            <a:solidFill>
-              <a:srgbClr val="E50046"/>
-            </a:solidFill>
-          </a:ln>
-        </p:spPr>
-        <p:style>
-          <a:lnRef idx="2">
-            <a:schemeClr val="accent1">
-              <a:shade val="50000"/>
-            </a:schemeClr>
-          </a:lnRef>
-          <a:fillRef idx="1">
-            <a:schemeClr val="accent1"/>
-          </a:fillRef>
-          <a:effectRef idx="0">
-            <a:schemeClr val="accent1"/>
-          </a:effectRef>
-          <a:fontRef idx="minor">
-            <a:schemeClr val="lt1"/>
-          </a:fontRef>
-        </p:style>
-        <p:txBody>
-          <a:bodyPr rtlCol="0" anchor="ctr"/>
-          <a:lstStyle/>
-          <a:p>
-            <a:pPr algn="ctr"/>
             <a:endParaRPr lang="ru-RU" dirty="0"/>
           </a:p>
         </p:txBody>
